--- a/assets/HackfiniX Template.pptx
+++ b/assets/HackfiniX Template.pptx
@@ -4668,10 +4668,10 @@
       </p:sp>
       <p:pic>
         <p:nvPicPr>
-          <p:cNvPr id="5" name="Picture 4">
-            <a:extLst>
-              <a:ext uri="{FF2B5EF4-FFF2-40B4-BE49-F238E27FC236}">
-                <a16:creationId xmlns:a16="http://schemas.microsoft.com/office/drawing/2014/main" id="{80F932DB-7255-B8BF-5BA9-0B5E1851A1C8}"/>
+          <p:cNvPr id="6" name="Picture 5">
+            <a:extLst>
+              <a:ext uri="{FF2B5EF4-FFF2-40B4-BE49-F238E27FC236}">
+                <a16:creationId xmlns:a16="http://schemas.microsoft.com/office/drawing/2014/main" id="{379E576A-21C3-EEED-44AC-756410C252DE}"/>
               </a:ext>
             </a:extLst>
           </p:cNvPr>
@@ -4682,42 +4682,6 @@
         </p:nvPicPr>
         <p:blipFill>
           <a:blip r:embed="rId2">
-            <a:extLst>
-              <a:ext uri="{28A0092B-C50C-407E-A947-70E740481C1C}">
-                <a14:useLocalDpi xmlns:a14="http://schemas.microsoft.com/office/drawing/2010/main" val="0"/>
-              </a:ext>
-            </a:extLst>
-          </a:blip>
-          <a:stretch>
-            <a:fillRect/>
-          </a:stretch>
-        </p:blipFill>
-        <p:spPr>
-          <a:xfrm>
-            <a:off x="11126139" y="105607"/>
-            <a:ext cx="902864" cy="732512"/>
-          </a:xfrm>
-          <a:prstGeom prst="rect">
-            <a:avLst/>
-          </a:prstGeom>
-        </p:spPr>
-      </p:pic>
-      <p:pic>
-        <p:nvPicPr>
-          <p:cNvPr id="6" name="Picture 5">
-            <a:extLst>
-              <a:ext uri="{FF2B5EF4-FFF2-40B4-BE49-F238E27FC236}">
-                <a16:creationId xmlns:a16="http://schemas.microsoft.com/office/drawing/2014/main" id="{379E576A-21C3-EEED-44AC-756410C252DE}"/>
-              </a:ext>
-            </a:extLst>
-          </p:cNvPr>
-          <p:cNvPicPr>
-            <a:picLocks noChangeAspect="1"/>
-          </p:cNvPicPr>
-          <p:nvPr/>
-        </p:nvPicPr>
-        <p:blipFill>
-          <a:blip r:embed="rId3">
             <a:extLst>
               <a:ext uri="{28A0092B-C50C-407E-A947-70E740481C1C}">
                 <a14:useLocalDpi xmlns:a14="http://schemas.microsoft.com/office/drawing/2010/main" val="0"/>
@@ -4753,7 +4717,7 @@
           <p:nvPr/>
         </p:nvPicPr>
         <p:blipFill>
-          <a:blip r:embed="rId4">
+          <a:blip r:embed="rId3">
             <a:extLst>
               <a:ext uri="{28A0092B-C50C-407E-A947-70E740481C1C}">
                 <a14:useLocalDpi xmlns:a14="http://schemas.microsoft.com/office/drawing/2010/main" val="0"/>
@@ -4768,6 +4732,36 @@
           <a:xfrm>
             <a:off x="5604421" y="105607"/>
             <a:ext cx="1185269" cy="605804"/>
+          </a:xfrm>
+          <a:prstGeom prst="rect">
+            <a:avLst/>
+          </a:prstGeom>
+        </p:spPr>
+      </p:pic>
+      <p:pic>
+        <p:nvPicPr>
+          <p:cNvPr id="9" name="Picture 8">
+            <a:extLst>
+              <a:ext uri="{FF2B5EF4-FFF2-40B4-BE49-F238E27FC236}">
+                <a16:creationId xmlns:a16="http://schemas.microsoft.com/office/drawing/2014/main" id="{C950D1CF-13CA-103E-D86E-74A429436DBE}"/>
+              </a:ext>
+            </a:extLst>
+          </p:cNvPr>
+          <p:cNvPicPr>
+            <a:picLocks noChangeAspect="1"/>
+          </p:cNvPicPr>
+          <p:nvPr/>
+        </p:nvPicPr>
+        <p:blipFill>
+          <a:blip r:embed="rId4"/>
+          <a:stretch>
+            <a:fillRect/>
+          </a:stretch>
+        </p:blipFill>
+        <p:spPr>
+          <a:xfrm>
+            <a:off x="11236554" y="-1"/>
+            <a:ext cx="901665" cy="803253"/>
           </a:xfrm>
           <a:prstGeom prst="rect">
             <a:avLst/>
